--- a/QFleet_SIH26138_CloudBusters.pptx
+++ b/QFleet_SIH26138_CloudBusters.pptx
@@ -5924,7 +5924,7 @@
                 </a:solidFill>
                 <a:latin typeface="Calibri"/>
               </a:rPr>
-              <a:t>Clean and Green Technology</a:t>
+              <a:t>Smart Vehicle</a:t>
             </a:r>
           </a:p>
           <a:p>
